--- a/05_misc/Overview_of_the_participatory_process.pptx
+++ b/05_misc/Overview_of_the_participatory_process.pptx
@@ -5,13 +5,15 @@
     <p:sldMasterId id="2147483648" r:id="rId1"/>
   </p:sldMasterIdLst>
   <p:notesMasterIdLst>
-    <p:notesMasterId r:id="rId6"/>
+    <p:notesMasterId r:id="rId8"/>
   </p:notesMasterIdLst>
   <p:sldIdLst>
     <p:sldId id="257" r:id="rId2"/>
     <p:sldId id="258" r:id="rId3"/>
     <p:sldId id="259" r:id="rId4"/>
     <p:sldId id="260" r:id="rId5"/>
+    <p:sldId id="261" r:id="rId6"/>
+    <p:sldId id="262" r:id="rId7"/>
   </p:sldIdLst>
   <p:sldSz cx="12192000" cy="6858000"/>
   <p:notesSz cx="6858000" cy="9144000"/>
@@ -200,7 +202,7 @@
           <a:p>
             <a:fld id="{30BF124B-64F9-42F8-ABA3-B9C08ACC788B}" type="datetimeFigureOut">
               <a:rPr lang="de-DE" smtClean="0"/>
-              <a:t>16.09.2026</a:t>
+              <a:t>18.09.2026</a:t>
             </a:fld>
             <a:endParaRPr lang="de-DE"/>
           </a:p>
@@ -698,7 +700,7 @@
           <a:p>
             <a:fld id="{1C73FA33-99CC-494F-A9D2-4EE56BD5E763}" type="datetimeFigureOut">
               <a:rPr lang="de-DE" smtClean="0"/>
-              <a:t>16.09.2026</a:t>
+              <a:t>18.09.2026</a:t>
             </a:fld>
             <a:endParaRPr lang="de-DE"/>
           </a:p>
@@ -896,7 +898,7 @@
           <a:p>
             <a:fld id="{1C73FA33-99CC-494F-A9D2-4EE56BD5E763}" type="datetimeFigureOut">
               <a:rPr lang="de-DE" smtClean="0"/>
-              <a:t>16.09.2026</a:t>
+              <a:t>18.09.2026</a:t>
             </a:fld>
             <a:endParaRPr lang="de-DE"/>
           </a:p>
@@ -1104,7 +1106,7 @@
           <a:p>
             <a:fld id="{1C73FA33-99CC-494F-A9D2-4EE56BD5E763}" type="datetimeFigureOut">
               <a:rPr lang="de-DE" smtClean="0"/>
-              <a:t>16.09.2026</a:t>
+              <a:t>18.09.2026</a:t>
             </a:fld>
             <a:endParaRPr lang="de-DE"/>
           </a:p>
@@ -1302,7 +1304,7 @@
           <a:p>
             <a:fld id="{1C73FA33-99CC-494F-A9D2-4EE56BD5E763}" type="datetimeFigureOut">
               <a:rPr lang="de-DE" smtClean="0"/>
-              <a:t>16.09.2026</a:t>
+              <a:t>18.09.2026</a:t>
             </a:fld>
             <a:endParaRPr lang="de-DE"/>
           </a:p>
@@ -1577,7 +1579,7 @@
           <a:p>
             <a:fld id="{1C73FA33-99CC-494F-A9D2-4EE56BD5E763}" type="datetimeFigureOut">
               <a:rPr lang="de-DE" smtClean="0"/>
-              <a:t>16.09.2026</a:t>
+              <a:t>18.09.2026</a:t>
             </a:fld>
             <a:endParaRPr lang="de-DE"/>
           </a:p>
@@ -1842,7 +1844,7 @@
           <a:p>
             <a:fld id="{1C73FA33-99CC-494F-A9D2-4EE56BD5E763}" type="datetimeFigureOut">
               <a:rPr lang="de-DE" smtClean="0"/>
-              <a:t>16.09.2026</a:t>
+              <a:t>18.09.2026</a:t>
             </a:fld>
             <a:endParaRPr lang="de-DE"/>
           </a:p>
@@ -2254,7 +2256,7 @@
           <a:p>
             <a:fld id="{1C73FA33-99CC-494F-A9D2-4EE56BD5E763}" type="datetimeFigureOut">
               <a:rPr lang="de-DE" smtClean="0"/>
-              <a:t>16.09.2026</a:t>
+              <a:t>18.09.2026</a:t>
             </a:fld>
             <a:endParaRPr lang="de-DE"/>
           </a:p>
@@ -2395,7 +2397,7 @@
           <a:p>
             <a:fld id="{1C73FA33-99CC-494F-A9D2-4EE56BD5E763}" type="datetimeFigureOut">
               <a:rPr lang="de-DE" smtClean="0"/>
-              <a:t>16.09.2026</a:t>
+              <a:t>18.09.2026</a:t>
             </a:fld>
             <a:endParaRPr lang="de-DE"/>
           </a:p>
@@ -2508,7 +2510,7 @@
           <a:p>
             <a:fld id="{1C73FA33-99CC-494F-A9D2-4EE56BD5E763}" type="datetimeFigureOut">
               <a:rPr lang="de-DE" smtClean="0"/>
-              <a:t>16.09.2026</a:t>
+              <a:t>18.09.2026</a:t>
             </a:fld>
             <a:endParaRPr lang="de-DE"/>
           </a:p>
@@ -2819,7 +2821,7 @@
           <a:p>
             <a:fld id="{1C73FA33-99CC-494F-A9D2-4EE56BD5E763}" type="datetimeFigureOut">
               <a:rPr lang="de-DE" smtClean="0"/>
-              <a:t>16.09.2026</a:t>
+              <a:t>18.09.2026</a:t>
             </a:fld>
             <a:endParaRPr lang="de-DE"/>
           </a:p>
@@ -3107,7 +3109,7 @@
           <a:p>
             <a:fld id="{1C73FA33-99CC-494F-A9D2-4EE56BD5E763}" type="datetimeFigureOut">
               <a:rPr lang="de-DE" smtClean="0"/>
-              <a:t>16.09.2026</a:t>
+              <a:t>18.09.2026</a:t>
             </a:fld>
             <a:endParaRPr lang="de-DE"/>
           </a:p>
@@ -3348,7 +3350,7 @@
           <a:p>
             <a:fld id="{1C73FA33-99CC-494F-A9D2-4EE56BD5E763}" type="datetimeFigureOut">
               <a:rPr lang="de-DE" smtClean="0"/>
-              <a:t>16.09.2026</a:t>
+              <a:t>18.09.2026</a:t>
             </a:fld>
             <a:endParaRPr lang="de-DE"/>
           </a:p>
@@ -7425,7 +7427,7 @@
         </p:nvSpPr>
         <p:spPr>
           <a:xfrm>
-            <a:off x="2740102" y="198287"/>
+            <a:off x="2740102" y="190123"/>
             <a:ext cx="6660000" cy="6480000"/>
           </a:xfrm>
           <a:prstGeom prst="roundRect">
@@ -7576,7 +7578,7 @@
         </p:nvSpPr>
         <p:spPr>
           <a:xfrm>
-            <a:off x="2746328" y="199192"/>
+            <a:off x="2746328" y="191028"/>
             <a:ext cx="6660000" cy="360000"/>
           </a:xfrm>
           <a:prstGeom prst="rect">
@@ -7621,7 +7623,7 @@
         </p:nvSpPr>
         <p:spPr>
           <a:xfrm>
-            <a:off x="263149" y="1393534"/>
+            <a:off x="258387" y="1393534"/>
             <a:ext cx="2160000" cy="1350000"/>
           </a:xfrm>
           <a:prstGeom prst="roundRect">
@@ -7672,7 +7674,7 @@
                 <a:latin typeface="Times New Roman" panose="02020603050405020304" pitchFamily="18" charset="0"/>
                 <a:cs typeface="Times New Roman" panose="02020603050405020304" pitchFamily="18" charset="0"/>
               </a:rPr>
-              <a:t>Media Informatics Chair</a:t>
+              <a:t>Media Informatics Program</a:t>
             </a:r>
           </a:p>
           <a:p>
@@ -7730,7 +7732,7 @@
         </p:nvSpPr>
         <p:spPr>
           <a:xfrm>
-            <a:off x="263149" y="2940511"/>
+            <a:off x="258387" y="2940511"/>
             <a:ext cx="2160000" cy="1350000"/>
           </a:xfrm>
           <a:prstGeom prst="roundRect">
@@ -7830,7 +7832,7 @@
         </p:nvSpPr>
         <p:spPr>
           <a:xfrm>
-            <a:off x="263148" y="4487487"/>
+            <a:off x="258386" y="4487487"/>
             <a:ext cx="2160000" cy="1350000"/>
           </a:xfrm>
           <a:prstGeom prst="roundRect">
@@ -7926,7 +7928,7 @@
         </p:nvGrpSpPr>
         <p:grpSpPr>
           <a:xfrm>
-            <a:off x="2861574" y="741939"/>
+            <a:off x="2861574" y="733775"/>
             <a:ext cx="2543176" cy="5736317"/>
             <a:chOff x="3248025" y="835932"/>
             <a:chExt cx="2543176" cy="5736317"/>
@@ -9110,7 +9112,7 @@
         </p:nvGrpSpPr>
         <p:grpSpPr>
           <a:xfrm>
-            <a:off x="5528319" y="741938"/>
+            <a:off x="5528319" y="733774"/>
             <a:ext cx="3753181" cy="5736317"/>
             <a:chOff x="5446679" y="741938"/>
             <a:chExt cx="3753181" cy="5736317"/>
@@ -9184,7 +9186,7 @@
           </p:nvSpPr>
           <p:spPr>
             <a:xfrm>
-              <a:off x="5611878" y="1337738"/>
+              <a:off x="5577586" y="1337738"/>
               <a:ext cx="1620000" cy="1350000"/>
             </a:xfrm>
             <a:prstGeom prst="roundRect">
@@ -9366,7 +9368,7 @@
           </p:nvSpPr>
           <p:spPr>
             <a:xfrm>
-              <a:off x="5612413" y="2824474"/>
+              <a:off x="5578121" y="2824474"/>
               <a:ext cx="3420000" cy="911735"/>
             </a:xfrm>
             <a:prstGeom prst="roundRect">
@@ -9555,7 +9557,7 @@
           </p:nvSpPr>
           <p:spPr>
             <a:xfrm>
-              <a:off x="5620296" y="3865092"/>
+              <a:off x="5586004" y="3865092"/>
               <a:ext cx="3420000" cy="1192046"/>
             </a:xfrm>
             <a:prstGeom prst="roundRect">
@@ -9752,7 +9754,7 @@
           </p:nvSpPr>
           <p:spPr>
             <a:xfrm>
-              <a:off x="5628179" y="5186021"/>
+              <a:off x="5593887" y="5186021"/>
               <a:ext cx="3420000" cy="1192046"/>
             </a:xfrm>
             <a:prstGeom prst="roundRect">
@@ -10017,7 +10019,7 @@
           </p:nvSpPr>
           <p:spPr>
             <a:xfrm>
-              <a:off x="7375939" y="1333678"/>
+              <a:off x="7379751" y="1333678"/>
               <a:ext cx="1620000" cy="1350000"/>
             </a:xfrm>
             <a:prstGeom prst="roundRect">
@@ -10176,6 +10178,831 @@
     <p:extLst>
       <p:ext uri="{BB962C8B-B14F-4D97-AF65-F5344CB8AC3E}">
         <p14:creationId xmlns:p14="http://schemas.microsoft.com/office/powerpoint/2010/main" val="784098201"/>
+      </p:ext>
+    </p:extLst>
+  </p:cSld>
+  <p:clrMapOvr>
+    <a:masterClrMapping/>
+  </p:clrMapOvr>
+</p:sld>
+</file>
+
+<file path=ppt/slides/slide5.xml><?xml version="1.0" encoding="utf-8"?>
+<p:sld xmlns:a="http://schemas.openxmlformats.org/drawingml/2006/main" xmlns:r="http://schemas.openxmlformats.org/officeDocument/2006/relationships" xmlns:p="http://schemas.openxmlformats.org/presentationml/2006/main" show="0">
+  <p:cSld>
+    <p:spTree>
+      <p:nvGrpSpPr>
+        <p:cNvPr id="1" name=""/>
+        <p:cNvGrpSpPr/>
+        <p:nvPr/>
+      </p:nvGrpSpPr>
+      <p:grpSpPr>
+        <a:xfrm>
+          <a:off x="0" y="0"/>
+          <a:ext cx="0" cy="0"/>
+          <a:chOff x="0" y="0"/>
+          <a:chExt cx="0" cy="0"/>
+        </a:xfrm>
+      </p:grpSpPr>
+      <p:grpSp>
+        <p:nvGrpSpPr>
+          <p:cNvPr id="7" name="Gruppieren 6">
+            <a:extLst>
+              <a:ext uri="{FF2B5EF4-FFF2-40B4-BE49-F238E27FC236}">
+                <a16:creationId xmlns:a16="http://schemas.microsoft.com/office/drawing/2014/main" id="{3C56A289-2199-8338-7F77-0190874A592D}"/>
+              </a:ext>
+            </a:extLst>
+          </p:cNvPr>
+          <p:cNvGrpSpPr/>
+          <p:nvPr/>
+        </p:nvGrpSpPr>
+        <p:grpSpPr>
+          <a:xfrm>
+            <a:off x="330975" y="445275"/>
+            <a:ext cx="6022200" cy="2424150"/>
+            <a:chOff x="1235850" y="321450"/>
+            <a:chExt cx="6022200" cy="2424150"/>
+          </a:xfrm>
+        </p:grpSpPr>
+        <p:pic>
+          <p:nvPicPr>
+            <p:cNvPr id="5" name="Grafik 4" descr="Weibliches Profil Silhouette">
+              <a:extLst>
+                <a:ext uri="{FF2B5EF4-FFF2-40B4-BE49-F238E27FC236}">
+                  <a16:creationId xmlns:a16="http://schemas.microsoft.com/office/drawing/2014/main" id="{98760DEA-C150-6A8F-ECA5-6F094F997D6B}"/>
+                </a:ext>
+              </a:extLst>
+            </p:cNvPr>
+            <p:cNvPicPr>
+              <a:picLocks noChangeAspect="1"/>
+            </p:cNvPicPr>
+            <p:nvPr/>
+          </p:nvPicPr>
+          <p:blipFill>
+            <a:blip>
+              <a:extLst>
+                <a:ext uri="{96DAC541-7B7A-43D3-8B79-37D633B846F1}">
+                  <asvg:svgBlip xmlns:asvg="http://schemas.microsoft.com/office/drawing/2016/SVG/main" r:embed="rId2"/>
+                </a:ext>
+              </a:extLst>
+            </a:blip>
+            <a:stretch>
+              <a:fillRect/>
+            </a:stretch>
+          </p:blipFill>
+          <p:spPr>
+            <a:xfrm>
+              <a:off x="1235850" y="1333500"/>
+              <a:ext cx="1412100" cy="1412100"/>
+            </a:xfrm>
+            <a:prstGeom prst="rect">
+              <a:avLst/>
+            </a:prstGeom>
+          </p:spPr>
+        </p:pic>
+        <p:sp>
+          <p:nvSpPr>
+            <p:cNvPr id="6" name="Sprechblase: oval 5">
+              <a:extLst>
+                <a:ext uri="{FF2B5EF4-FFF2-40B4-BE49-F238E27FC236}">
+                  <a16:creationId xmlns:a16="http://schemas.microsoft.com/office/drawing/2014/main" id="{5E04CF86-839B-33C4-FAD8-964E20F58776}"/>
+                </a:ext>
+              </a:extLst>
+            </p:cNvPr>
+            <p:cNvSpPr/>
+            <p:nvPr/>
+          </p:nvSpPr>
+          <p:spPr>
+            <a:xfrm>
+              <a:off x="2647950" y="321450"/>
+              <a:ext cx="4610100" cy="1412100"/>
+            </a:xfrm>
+            <a:prstGeom prst="wedgeEllipseCallout">
+              <a:avLst>
+                <a:gd name="adj1" fmla="val -53478"/>
+                <a:gd name="adj2" fmla="val 46986"/>
+              </a:avLst>
+            </a:prstGeom>
+            <a:noFill/>
+            <a:ln w="38100" cap="flat" cmpd="sng" algn="ctr">
+              <a:solidFill>
+                <a:srgbClr val="054A29"/>
+              </a:solidFill>
+              <a:prstDash val="solid"/>
+              <a:round/>
+              <a:headEnd type="none" w="med" len="med"/>
+              <a:tailEnd type="none" w="med" len="med"/>
+            </a:ln>
+          </p:spPr>
+          <p:style>
+            <a:lnRef idx="0">
+              <a:scrgbClr r="0" g="0" b="0"/>
+            </a:lnRef>
+            <a:fillRef idx="0">
+              <a:scrgbClr r="0" g="0" b="0"/>
+            </a:fillRef>
+            <a:effectRef idx="0">
+              <a:scrgbClr r="0" g="0" b="0"/>
+            </a:effectRef>
+            <a:fontRef idx="minor">
+              <a:schemeClr val="accent6"/>
+            </a:fontRef>
+          </p:style>
+          <p:txBody>
+            <a:bodyPr rtlCol="0" anchor="ctr"/>
+            <a:lstStyle/>
+            <a:p>
+              <a:pPr algn="ctr"/>
+              <a:r>
+                <a:rPr lang="de-DE" sz="2000" dirty="0">
+                  <a:solidFill>
+                    <a:schemeClr val="tx1"/>
+                  </a:solidFill>
+                  <a:latin typeface="Times New Roman" panose="02020603050405020304" pitchFamily="18" charset="0"/>
+                  <a:cs typeface="Times New Roman" panose="02020603050405020304" pitchFamily="18" charset="0"/>
+                </a:rPr>
+                <a:t>Profs sollen einem sagen wie sie sich die KI- Nutzung im Kurs vorstellen.</a:t>
+              </a:r>
+            </a:p>
+          </p:txBody>
+        </p:sp>
+      </p:grpSp>
+      <p:grpSp>
+        <p:nvGrpSpPr>
+          <p:cNvPr id="12" name="Gruppieren 11">
+            <a:extLst>
+              <a:ext uri="{FF2B5EF4-FFF2-40B4-BE49-F238E27FC236}">
+                <a16:creationId xmlns:a16="http://schemas.microsoft.com/office/drawing/2014/main" id="{9324759E-47FA-2DB9-A1F4-294AF0889497}"/>
+              </a:ext>
+            </a:extLst>
+          </p:cNvPr>
+          <p:cNvGrpSpPr/>
+          <p:nvPr/>
+        </p:nvGrpSpPr>
+        <p:grpSpPr>
+          <a:xfrm>
+            <a:off x="5419725" y="2163375"/>
+            <a:ext cx="6022200" cy="2288400"/>
+            <a:chOff x="4657725" y="1657350"/>
+            <a:chExt cx="6022200" cy="2288400"/>
+          </a:xfrm>
+        </p:grpSpPr>
+        <p:pic>
+          <p:nvPicPr>
+            <p:cNvPr id="3" name="Grafik 2" descr="Männliches Profil Silhouette">
+              <a:extLst>
+                <a:ext uri="{FF2B5EF4-FFF2-40B4-BE49-F238E27FC236}">
+                  <a16:creationId xmlns:a16="http://schemas.microsoft.com/office/drawing/2014/main" id="{5A20489C-CDD9-832C-C3DA-18CE271A71DD}"/>
+                </a:ext>
+              </a:extLst>
+            </p:cNvPr>
+            <p:cNvPicPr>
+              <a:picLocks noChangeAspect="1"/>
+            </p:cNvPicPr>
+            <p:nvPr/>
+          </p:nvPicPr>
+          <p:blipFill>
+            <a:blip>
+              <a:extLst>
+                <a:ext uri="{96DAC541-7B7A-43D3-8B79-37D633B846F1}">
+                  <asvg:svgBlip xmlns:asvg="http://schemas.microsoft.com/office/drawing/2016/SVG/main" r:embed="rId3"/>
+                </a:ext>
+              </a:extLst>
+            </a:blip>
+            <a:stretch>
+              <a:fillRect/>
+            </a:stretch>
+          </p:blipFill>
+          <p:spPr>
+            <a:xfrm>
+              <a:off x="9267825" y="2533650"/>
+              <a:ext cx="1412100" cy="1412100"/>
+            </a:xfrm>
+            <a:prstGeom prst="rect">
+              <a:avLst/>
+            </a:prstGeom>
+          </p:spPr>
+        </p:pic>
+        <p:sp>
+          <p:nvSpPr>
+            <p:cNvPr id="11" name="Sprechblase: oval 10">
+              <a:extLst>
+                <a:ext uri="{FF2B5EF4-FFF2-40B4-BE49-F238E27FC236}">
+                  <a16:creationId xmlns:a16="http://schemas.microsoft.com/office/drawing/2014/main" id="{D0833782-BE31-C178-4D02-97A7C03B6FB6}"/>
+                </a:ext>
+              </a:extLst>
+            </p:cNvPr>
+            <p:cNvSpPr/>
+            <p:nvPr/>
+          </p:nvSpPr>
+          <p:spPr>
+            <a:xfrm flipH="1">
+              <a:off x="4657725" y="1657350"/>
+              <a:ext cx="4610100" cy="1412100"/>
+            </a:xfrm>
+            <a:prstGeom prst="wedgeEllipseCallout">
+              <a:avLst>
+                <a:gd name="adj1" fmla="val -53478"/>
+                <a:gd name="adj2" fmla="val 46986"/>
+              </a:avLst>
+            </a:prstGeom>
+            <a:noFill/>
+            <a:ln w="38100" cap="flat" cmpd="sng" algn="ctr">
+              <a:solidFill>
+                <a:srgbClr val="482E41"/>
+              </a:solidFill>
+              <a:prstDash val="solid"/>
+              <a:round/>
+              <a:headEnd type="none" w="med" len="med"/>
+              <a:tailEnd type="none" w="med" len="med"/>
+            </a:ln>
+          </p:spPr>
+          <p:style>
+            <a:lnRef idx="0">
+              <a:scrgbClr r="0" g="0" b="0"/>
+            </a:lnRef>
+            <a:fillRef idx="0">
+              <a:scrgbClr r="0" g="0" b="0"/>
+            </a:fillRef>
+            <a:effectRef idx="0">
+              <a:scrgbClr r="0" g="0" b="0"/>
+            </a:effectRef>
+            <a:fontRef idx="minor">
+              <a:schemeClr val="accent6"/>
+            </a:fontRef>
+          </p:style>
+          <p:txBody>
+            <a:bodyPr rtlCol="0" anchor="ctr"/>
+            <a:lstStyle/>
+            <a:p>
+              <a:pPr algn="ctr"/>
+              <a:r>
+                <a:rPr lang="de-DE" sz="2000" dirty="0">
+                  <a:solidFill>
+                    <a:schemeClr val="tx1"/>
+                  </a:solidFill>
+                  <a:latin typeface="Times New Roman" panose="02020603050405020304" pitchFamily="18" charset="0"/>
+                  <a:cs typeface="Times New Roman" panose="02020603050405020304" pitchFamily="18" charset="0"/>
+                </a:rPr>
+                <a:t>Regeln zur Kennzeichnung notwendig (sinnvolle!)</a:t>
+              </a:r>
+            </a:p>
+          </p:txBody>
+        </p:sp>
+      </p:grpSp>
+      <p:grpSp>
+        <p:nvGrpSpPr>
+          <p:cNvPr id="16" name="Gruppieren 15">
+            <a:extLst>
+              <a:ext uri="{FF2B5EF4-FFF2-40B4-BE49-F238E27FC236}">
+                <a16:creationId xmlns:a16="http://schemas.microsoft.com/office/drawing/2014/main" id="{EBD648A7-98E6-D8C8-8C16-67D1748D0E6D}"/>
+              </a:ext>
+            </a:extLst>
+          </p:cNvPr>
+          <p:cNvGrpSpPr/>
+          <p:nvPr/>
+        </p:nvGrpSpPr>
+        <p:grpSpPr>
+          <a:xfrm flipH="1">
+            <a:off x="330975" y="3745725"/>
+            <a:ext cx="6022200" cy="2288400"/>
+            <a:chOff x="4657725" y="1657350"/>
+            <a:chExt cx="6022200" cy="2288400"/>
+          </a:xfrm>
+        </p:grpSpPr>
+        <p:pic>
+          <p:nvPicPr>
+            <p:cNvPr id="17" name="Grafik 16" descr="Männliches Profil Silhouette">
+              <a:extLst>
+                <a:ext uri="{FF2B5EF4-FFF2-40B4-BE49-F238E27FC236}">
+                  <a16:creationId xmlns:a16="http://schemas.microsoft.com/office/drawing/2014/main" id="{E1FFB9F1-3367-60E3-4433-4375A0436CA9}"/>
+                </a:ext>
+              </a:extLst>
+            </p:cNvPr>
+            <p:cNvPicPr>
+              <a:picLocks noChangeAspect="1"/>
+            </p:cNvPicPr>
+            <p:nvPr/>
+          </p:nvPicPr>
+          <p:blipFill>
+            <a:blip>
+              <a:extLst>
+                <a:ext uri="{96DAC541-7B7A-43D3-8B79-37D633B846F1}">
+                  <asvg:svgBlip xmlns:asvg="http://schemas.microsoft.com/office/drawing/2016/SVG/main" r:embed="rId3"/>
+                </a:ext>
+              </a:extLst>
+            </a:blip>
+            <a:stretch>
+              <a:fillRect/>
+            </a:stretch>
+          </p:blipFill>
+          <p:spPr>
+            <a:xfrm>
+              <a:off x="9267825" y="2533650"/>
+              <a:ext cx="1412100" cy="1412100"/>
+            </a:xfrm>
+            <a:prstGeom prst="rect">
+              <a:avLst/>
+            </a:prstGeom>
+          </p:spPr>
+        </p:pic>
+        <p:sp>
+          <p:nvSpPr>
+            <p:cNvPr id="18" name="Sprechblase: oval 17">
+              <a:extLst>
+                <a:ext uri="{FF2B5EF4-FFF2-40B4-BE49-F238E27FC236}">
+                  <a16:creationId xmlns:a16="http://schemas.microsoft.com/office/drawing/2014/main" id="{4A27222E-1F0D-CDF2-7552-FF7B409679F3}"/>
+                </a:ext>
+              </a:extLst>
+            </p:cNvPr>
+            <p:cNvSpPr/>
+            <p:nvPr/>
+          </p:nvSpPr>
+          <p:spPr>
+            <a:xfrm flipH="1">
+              <a:off x="4657725" y="1657350"/>
+              <a:ext cx="4610100" cy="1412100"/>
+            </a:xfrm>
+            <a:prstGeom prst="wedgeEllipseCallout">
+              <a:avLst>
+                <a:gd name="adj1" fmla="val -53478"/>
+                <a:gd name="adj2" fmla="val 46986"/>
+              </a:avLst>
+            </a:prstGeom>
+            <a:noFill/>
+            <a:ln w="38100" cap="flat" cmpd="sng" algn="ctr">
+              <a:solidFill>
+                <a:srgbClr val="156082"/>
+              </a:solidFill>
+              <a:prstDash val="solid"/>
+              <a:round/>
+              <a:headEnd type="none" w="med" len="med"/>
+              <a:tailEnd type="none" w="med" len="med"/>
+            </a:ln>
+          </p:spPr>
+          <p:style>
+            <a:lnRef idx="0">
+              <a:scrgbClr r="0" g="0" b="0"/>
+            </a:lnRef>
+            <a:fillRef idx="0">
+              <a:scrgbClr r="0" g="0" b="0"/>
+            </a:fillRef>
+            <a:effectRef idx="0">
+              <a:scrgbClr r="0" g="0" b="0"/>
+            </a:effectRef>
+            <a:fontRef idx="minor">
+              <a:schemeClr val="accent6"/>
+            </a:fontRef>
+          </p:style>
+          <p:txBody>
+            <a:bodyPr rtlCol="0" anchor="ctr"/>
+            <a:lstStyle/>
+            <a:p>
+              <a:pPr algn="ctr"/>
+              <a:r>
+                <a:rPr lang="de-DE" sz="2000" dirty="0">
+                  <a:solidFill>
+                    <a:schemeClr val="tx1"/>
+                  </a:solidFill>
+                  <a:latin typeface="Times New Roman" panose="02020603050405020304" pitchFamily="18" charset="0"/>
+                  <a:cs typeface="Times New Roman" panose="02020603050405020304" pitchFamily="18" charset="0"/>
+                </a:rPr>
+                <a:t>Darf ich Dozentenfolien von KI verarbeiten / zusammenfassen lassen?</a:t>
+              </a:r>
+            </a:p>
+          </p:txBody>
+        </p:sp>
+      </p:grpSp>
+    </p:spTree>
+    <p:extLst>
+      <p:ext uri="{BB962C8B-B14F-4D97-AF65-F5344CB8AC3E}">
+        <p14:creationId xmlns:p14="http://schemas.microsoft.com/office/powerpoint/2010/main" val="2002977179"/>
+      </p:ext>
+    </p:extLst>
+  </p:cSld>
+  <p:clrMapOvr>
+    <a:masterClrMapping/>
+  </p:clrMapOvr>
+</p:sld>
+</file>
+
+<file path=ppt/slides/slide6.xml><?xml version="1.0" encoding="utf-8"?>
+<p:sld xmlns:a="http://schemas.openxmlformats.org/drawingml/2006/main" xmlns:r="http://schemas.openxmlformats.org/officeDocument/2006/relationships" xmlns:p="http://schemas.openxmlformats.org/presentationml/2006/main" show="0">
+  <p:cSld>
+    <p:spTree>
+      <p:nvGrpSpPr>
+        <p:cNvPr id="1" name="">
+          <a:extLst>
+            <a:ext uri="{FF2B5EF4-FFF2-40B4-BE49-F238E27FC236}">
+              <a16:creationId xmlns:a16="http://schemas.microsoft.com/office/drawing/2014/main" id="{D5C6DF27-3234-CB4A-1030-EF3CB86F972F}"/>
+            </a:ext>
+          </a:extLst>
+        </p:cNvPr>
+        <p:cNvGrpSpPr/>
+        <p:nvPr/>
+      </p:nvGrpSpPr>
+      <p:grpSpPr>
+        <a:xfrm>
+          <a:off x="0" y="0"/>
+          <a:ext cx="0" cy="0"/>
+          <a:chOff x="0" y="0"/>
+          <a:chExt cx="0" cy="0"/>
+        </a:xfrm>
+      </p:grpSpPr>
+      <p:grpSp>
+        <p:nvGrpSpPr>
+          <p:cNvPr id="7" name="Gruppieren 6">
+            <a:extLst>
+              <a:ext uri="{FF2B5EF4-FFF2-40B4-BE49-F238E27FC236}">
+                <a16:creationId xmlns:a16="http://schemas.microsoft.com/office/drawing/2014/main" id="{5DF8B250-4B20-504B-B96E-953E1E00635B}"/>
+              </a:ext>
+            </a:extLst>
+          </p:cNvPr>
+          <p:cNvGrpSpPr/>
+          <p:nvPr/>
+        </p:nvGrpSpPr>
+        <p:grpSpPr>
+          <a:xfrm>
+            <a:off x="330975" y="445275"/>
+            <a:ext cx="6022200" cy="2424150"/>
+            <a:chOff x="1235850" y="321450"/>
+            <a:chExt cx="6022200" cy="2424150"/>
+          </a:xfrm>
+        </p:grpSpPr>
+        <p:pic>
+          <p:nvPicPr>
+            <p:cNvPr id="5" name="Grafik 4" descr="Weibliches Profil Silhouette">
+              <a:extLst>
+                <a:ext uri="{FF2B5EF4-FFF2-40B4-BE49-F238E27FC236}">
+                  <a16:creationId xmlns:a16="http://schemas.microsoft.com/office/drawing/2014/main" id="{71686AE6-517D-8C75-5389-8434A2EA3626}"/>
+                </a:ext>
+              </a:extLst>
+            </p:cNvPr>
+            <p:cNvPicPr>
+              <a:picLocks noChangeAspect="1"/>
+            </p:cNvPicPr>
+            <p:nvPr/>
+          </p:nvPicPr>
+          <p:blipFill>
+            <a:blip>
+              <a:extLst>
+                <a:ext uri="{96DAC541-7B7A-43D3-8B79-37D633B846F1}">
+                  <asvg:svgBlip xmlns:asvg="http://schemas.microsoft.com/office/drawing/2016/SVG/main" r:embed="rId2"/>
+                </a:ext>
+              </a:extLst>
+            </a:blip>
+            <a:stretch>
+              <a:fillRect/>
+            </a:stretch>
+          </p:blipFill>
+          <p:spPr>
+            <a:xfrm>
+              <a:off x="1235850" y="1333500"/>
+              <a:ext cx="1412100" cy="1412100"/>
+            </a:xfrm>
+            <a:prstGeom prst="rect">
+              <a:avLst/>
+            </a:prstGeom>
+          </p:spPr>
+        </p:pic>
+        <p:sp>
+          <p:nvSpPr>
+            <p:cNvPr id="6" name="Sprechblase: oval 5">
+              <a:extLst>
+                <a:ext uri="{FF2B5EF4-FFF2-40B4-BE49-F238E27FC236}">
+                  <a16:creationId xmlns:a16="http://schemas.microsoft.com/office/drawing/2014/main" id="{1AB5C0BB-42C6-7D05-B6F8-41D2200D9E5A}"/>
+                </a:ext>
+              </a:extLst>
+            </p:cNvPr>
+            <p:cNvSpPr/>
+            <p:nvPr/>
+          </p:nvSpPr>
+          <p:spPr>
+            <a:xfrm>
+              <a:off x="2647950" y="321450"/>
+              <a:ext cx="4610100" cy="1412100"/>
+            </a:xfrm>
+            <a:prstGeom prst="wedgeEllipseCallout">
+              <a:avLst>
+                <a:gd name="adj1" fmla="val -53478"/>
+                <a:gd name="adj2" fmla="val 46986"/>
+              </a:avLst>
+            </a:prstGeom>
+            <a:noFill/>
+            <a:ln w="38100" cap="flat" cmpd="sng" algn="ctr">
+              <a:solidFill>
+                <a:srgbClr val="054A29"/>
+              </a:solidFill>
+              <a:prstDash val="solid"/>
+              <a:round/>
+              <a:headEnd type="none" w="med" len="med"/>
+              <a:tailEnd type="none" w="med" len="med"/>
+            </a:ln>
+          </p:spPr>
+          <p:style>
+            <a:lnRef idx="0">
+              <a:scrgbClr r="0" g="0" b="0"/>
+            </a:lnRef>
+            <a:fillRef idx="0">
+              <a:scrgbClr r="0" g="0" b="0"/>
+            </a:fillRef>
+            <a:effectRef idx="0">
+              <a:scrgbClr r="0" g="0" b="0"/>
+            </a:effectRef>
+            <a:fontRef idx="minor">
+              <a:schemeClr val="accent6"/>
+            </a:fontRef>
+          </p:style>
+          <p:txBody>
+            <a:bodyPr rtlCol="0" anchor="ctr"/>
+            <a:lstStyle/>
+            <a:p>
+              <a:pPr algn="ctr"/>
+              <a:r>
+                <a:rPr lang="en-US" sz="2000" dirty="0">
+                  <a:solidFill>
+                    <a:schemeClr val="tx1"/>
+                  </a:solidFill>
+                  <a:latin typeface="Times New Roman" panose="02020603050405020304" pitchFamily="18" charset="0"/>
+                  <a:cs typeface="Times New Roman" panose="02020603050405020304" pitchFamily="18" charset="0"/>
+                </a:rPr>
+                <a:t>Professors should explain how they expect students to use AI in their courses.</a:t>
+              </a:r>
+              <a:endParaRPr lang="de-DE" sz="2000" dirty="0">
+                <a:solidFill>
+                  <a:schemeClr val="tx1"/>
+                </a:solidFill>
+                <a:latin typeface="Times New Roman" panose="02020603050405020304" pitchFamily="18" charset="0"/>
+                <a:cs typeface="Times New Roman" panose="02020603050405020304" pitchFamily="18" charset="0"/>
+              </a:endParaRPr>
+            </a:p>
+          </p:txBody>
+        </p:sp>
+      </p:grpSp>
+      <p:grpSp>
+        <p:nvGrpSpPr>
+          <p:cNvPr id="12" name="Gruppieren 11">
+            <a:extLst>
+              <a:ext uri="{FF2B5EF4-FFF2-40B4-BE49-F238E27FC236}">
+                <a16:creationId xmlns:a16="http://schemas.microsoft.com/office/drawing/2014/main" id="{51109B9D-5870-5EF7-16B5-73E7527ADCB9}"/>
+              </a:ext>
+            </a:extLst>
+          </p:cNvPr>
+          <p:cNvGrpSpPr/>
+          <p:nvPr/>
+        </p:nvGrpSpPr>
+        <p:grpSpPr>
+          <a:xfrm>
+            <a:off x="5419725" y="2163375"/>
+            <a:ext cx="6022200" cy="2288400"/>
+            <a:chOff x="4657725" y="1657350"/>
+            <a:chExt cx="6022200" cy="2288400"/>
+          </a:xfrm>
+        </p:grpSpPr>
+        <p:pic>
+          <p:nvPicPr>
+            <p:cNvPr id="3" name="Grafik 2" descr="Männliches Profil Silhouette">
+              <a:extLst>
+                <a:ext uri="{FF2B5EF4-FFF2-40B4-BE49-F238E27FC236}">
+                  <a16:creationId xmlns:a16="http://schemas.microsoft.com/office/drawing/2014/main" id="{AEDDA8B4-00F9-082B-590F-1E88D06BF7D0}"/>
+                </a:ext>
+              </a:extLst>
+            </p:cNvPr>
+            <p:cNvPicPr>
+              <a:picLocks noChangeAspect="1"/>
+            </p:cNvPicPr>
+            <p:nvPr/>
+          </p:nvPicPr>
+          <p:blipFill>
+            <a:blip>
+              <a:extLst>
+                <a:ext uri="{96DAC541-7B7A-43D3-8B79-37D633B846F1}">
+                  <asvg:svgBlip xmlns:asvg="http://schemas.microsoft.com/office/drawing/2016/SVG/main" r:embed="rId3"/>
+                </a:ext>
+              </a:extLst>
+            </a:blip>
+            <a:stretch>
+              <a:fillRect/>
+            </a:stretch>
+          </p:blipFill>
+          <p:spPr>
+            <a:xfrm>
+              <a:off x="9267825" y="2533650"/>
+              <a:ext cx="1412100" cy="1412100"/>
+            </a:xfrm>
+            <a:prstGeom prst="rect">
+              <a:avLst/>
+            </a:prstGeom>
+          </p:spPr>
+        </p:pic>
+        <p:sp>
+          <p:nvSpPr>
+            <p:cNvPr id="11" name="Sprechblase: oval 10">
+              <a:extLst>
+                <a:ext uri="{FF2B5EF4-FFF2-40B4-BE49-F238E27FC236}">
+                  <a16:creationId xmlns:a16="http://schemas.microsoft.com/office/drawing/2014/main" id="{E7403BEF-1284-54BB-BD55-4A24E12A5BB1}"/>
+                </a:ext>
+              </a:extLst>
+            </p:cNvPr>
+            <p:cNvSpPr/>
+            <p:nvPr/>
+          </p:nvSpPr>
+          <p:spPr>
+            <a:xfrm flipH="1">
+              <a:off x="4657725" y="1657350"/>
+              <a:ext cx="4610100" cy="1412100"/>
+            </a:xfrm>
+            <a:prstGeom prst="wedgeEllipseCallout">
+              <a:avLst>
+                <a:gd name="adj1" fmla="val -53478"/>
+                <a:gd name="adj2" fmla="val 46986"/>
+              </a:avLst>
+            </a:prstGeom>
+            <a:noFill/>
+            <a:ln w="38100" cap="flat" cmpd="sng" algn="ctr">
+              <a:solidFill>
+                <a:srgbClr val="482E41"/>
+              </a:solidFill>
+              <a:prstDash val="solid"/>
+              <a:round/>
+              <a:headEnd type="none" w="med" len="med"/>
+              <a:tailEnd type="none" w="med" len="med"/>
+            </a:ln>
+          </p:spPr>
+          <p:style>
+            <a:lnRef idx="0">
+              <a:scrgbClr r="0" g="0" b="0"/>
+            </a:lnRef>
+            <a:fillRef idx="0">
+              <a:scrgbClr r="0" g="0" b="0"/>
+            </a:fillRef>
+            <a:effectRef idx="0">
+              <a:scrgbClr r="0" g="0" b="0"/>
+            </a:effectRef>
+            <a:fontRef idx="minor">
+              <a:schemeClr val="accent6"/>
+            </a:fontRef>
+          </p:style>
+          <p:txBody>
+            <a:bodyPr rtlCol="0" anchor="ctr"/>
+            <a:lstStyle/>
+            <a:p>
+              <a:pPr algn="ctr"/>
+              <a:r>
+                <a:rPr lang="en-US" sz="2000" dirty="0">
+                  <a:solidFill>
+                    <a:schemeClr val="tx1"/>
+                  </a:solidFill>
+                  <a:latin typeface="Times New Roman" panose="02020603050405020304" pitchFamily="18" charset="0"/>
+                  <a:cs typeface="Times New Roman" panose="02020603050405020304" pitchFamily="18" charset="0"/>
+                </a:rPr>
+                <a:t>Rules for AI usage are necessary (reasonable Rules!)</a:t>
+              </a:r>
+              <a:endParaRPr lang="de-DE" sz="2000" dirty="0">
+                <a:solidFill>
+                  <a:schemeClr val="tx1"/>
+                </a:solidFill>
+                <a:latin typeface="Times New Roman" panose="02020603050405020304" pitchFamily="18" charset="0"/>
+                <a:cs typeface="Times New Roman" panose="02020603050405020304" pitchFamily="18" charset="0"/>
+              </a:endParaRPr>
+            </a:p>
+          </p:txBody>
+        </p:sp>
+      </p:grpSp>
+      <p:grpSp>
+        <p:nvGrpSpPr>
+          <p:cNvPr id="16" name="Gruppieren 15">
+            <a:extLst>
+              <a:ext uri="{FF2B5EF4-FFF2-40B4-BE49-F238E27FC236}">
+                <a16:creationId xmlns:a16="http://schemas.microsoft.com/office/drawing/2014/main" id="{378FECA2-2591-94DE-50F9-3EEE3763D36E}"/>
+              </a:ext>
+            </a:extLst>
+          </p:cNvPr>
+          <p:cNvGrpSpPr/>
+          <p:nvPr/>
+        </p:nvGrpSpPr>
+        <p:grpSpPr>
+          <a:xfrm flipH="1">
+            <a:off x="330975" y="3745725"/>
+            <a:ext cx="6022200" cy="2288400"/>
+            <a:chOff x="4657725" y="1657350"/>
+            <a:chExt cx="6022200" cy="2288400"/>
+          </a:xfrm>
+        </p:grpSpPr>
+        <p:pic>
+          <p:nvPicPr>
+            <p:cNvPr id="17" name="Grafik 16" descr="Männliches Profil Silhouette">
+              <a:extLst>
+                <a:ext uri="{FF2B5EF4-FFF2-40B4-BE49-F238E27FC236}">
+                  <a16:creationId xmlns:a16="http://schemas.microsoft.com/office/drawing/2014/main" id="{36FA3310-ADB0-7F5E-BAA7-F53692AABEC2}"/>
+                </a:ext>
+              </a:extLst>
+            </p:cNvPr>
+            <p:cNvPicPr>
+              <a:picLocks noChangeAspect="1"/>
+            </p:cNvPicPr>
+            <p:nvPr/>
+          </p:nvPicPr>
+          <p:blipFill>
+            <a:blip>
+              <a:extLst>
+                <a:ext uri="{96DAC541-7B7A-43D3-8B79-37D633B846F1}">
+                  <asvg:svgBlip xmlns:asvg="http://schemas.microsoft.com/office/drawing/2016/SVG/main" r:embed="rId3"/>
+                </a:ext>
+              </a:extLst>
+            </a:blip>
+            <a:stretch>
+              <a:fillRect/>
+            </a:stretch>
+          </p:blipFill>
+          <p:spPr>
+            <a:xfrm>
+              <a:off x="9267825" y="2533650"/>
+              <a:ext cx="1412100" cy="1412100"/>
+            </a:xfrm>
+            <a:prstGeom prst="rect">
+              <a:avLst/>
+            </a:prstGeom>
+          </p:spPr>
+        </p:pic>
+        <p:sp>
+          <p:nvSpPr>
+            <p:cNvPr id="18" name="Sprechblase: oval 17">
+              <a:extLst>
+                <a:ext uri="{FF2B5EF4-FFF2-40B4-BE49-F238E27FC236}">
+                  <a16:creationId xmlns:a16="http://schemas.microsoft.com/office/drawing/2014/main" id="{4CC5607C-1678-7A5A-8E8A-0A319D6BCBFB}"/>
+                </a:ext>
+              </a:extLst>
+            </p:cNvPr>
+            <p:cNvSpPr/>
+            <p:nvPr/>
+          </p:nvSpPr>
+          <p:spPr>
+            <a:xfrm flipH="1">
+              <a:off x="4657725" y="1657350"/>
+              <a:ext cx="4610100" cy="1412100"/>
+            </a:xfrm>
+            <a:prstGeom prst="wedgeEllipseCallout">
+              <a:avLst>
+                <a:gd name="adj1" fmla="val -53478"/>
+                <a:gd name="adj2" fmla="val 46986"/>
+              </a:avLst>
+            </a:prstGeom>
+            <a:noFill/>
+            <a:ln w="38100" cap="flat" cmpd="sng" algn="ctr">
+              <a:solidFill>
+                <a:srgbClr val="156082"/>
+              </a:solidFill>
+              <a:prstDash val="solid"/>
+              <a:round/>
+              <a:headEnd type="none" w="med" len="med"/>
+              <a:tailEnd type="none" w="med" len="med"/>
+            </a:ln>
+          </p:spPr>
+          <p:style>
+            <a:lnRef idx="0">
+              <a:scrgbClr r="0" g="0" b="0"/>
+            </a:lnRef>
+            <a:fillRef idx="0">
+              <a:scrgbClr r="0" g="0" b="0"/>
+            </a:fillRef>
+            <a:effectRef idx="0">
+              <a:scrgbClr r="0" g="0" b="0"/>
+            </a:effectRef>
+            <a:fontRef idx="minor">
+              <a:schemeClr val="accent6"/>
+            </a:fontRef>
+          </p:style>
+          <p:txBody>
+            <a:bodyPr rtlCol="0" anchor="ctr"/>
+            <a:lstStyle/>
+            <a:p>
+              <a:pPr algn="ctr"/>
+              <a:r>
+                <a:rPr lang="en-US" sz="2000" dirty="0">
+                  <a:solidFill>
+                    <a:schemeClr val="tx1"/>
+                  </a:solidFill>
+                  <a:latin typeface="Times New Roman" panose="02020603050405020304" pitchFamily="18" charset="0"/>
+                  <a:cs typeface="Times New Roman" panose="02020603050405020304" pitchFamily="18" charset="0"/>
+                </a:rPr>
+                <a:t>Am I allowed to have AI process or summarize lecture slides?</a:t>
+              </a:r>
+              <a:endParaRPr lang="de-DE" sz="2000" dirty="0">
+                <a:solidFill>
+                  <a:schemeClr val="tx1"/>
+                </a:solidFill>
+                <a:latin typeface="Times New Roman" panose="02020603050405020304" pitchFamily="18" charset="0"/>
+                <a:cs typeface="Times New Roman" panose="02020603050405020304" pitchFamily="18" charset="0"/>
+              </a:endParaRPr>
+            </a:p>
+          </p:txBody>
+        </p:sp>
+      </p:grpSp>
+    </p:spTree>
+    <p:extLst>
+      <p:ext uri="{BB962C8B-B14F-4D97-AF65-F5344CB8AC3E}">
+        <p14:creationId xmlns:p14="http://schemas.microsoft.com/office/powerpoint/2010/main" val="1221252526"/>
       </p:ext>
     </p:extLst>
   </p:cSld>
